--- a/og/layouts/lcd_and_button_panel/lcd_and_button_panel_summary.pptx
+++ b/og/layouts/lcd_and_button_panel/lcd_and_button_panel_summary.pptx
@@ -5,16 +5,15 @@
     <p:sldMasterId id="2147483660" r:id="rId1"/>
   </p:sldMasterIdLst>
   <p:notesMasterIdLst>
-    <p:notesMasterId r:id="rId9"/>
+    <p:notesMasterId r:id="rId8"/>
   </p:notesMasterIdLst>
   <p:sldIdLst>
     <p:sldId id="256" r:id="rId2"/>
     <p:sldId id="257" r:id="rId3"/>
-    <p:sldId id="258" r:id="rId4"/>
-    <p:sldId id="259" r:id="rId5"/>
-    <p:sldId id="262" r:id="rId6"/>
-    <p:sldId id="260" r:id="rId7"/>
-    <p:sldId id="261" r:id="rId8"/>
+    <p:sldId id="259" r:id="rId4"/>
+    <p:sldId id="260" r:id="rId5"/>
+    <p:sldId id="261" r:id="rId6"/>
+    <p:sldId id="262" r:id="rId7"/>
   </p:sldIdLst>
   <p:sldSz cx="9144000" cy="6858000" type="screen4x3"/>
   <p:notesSz cx="7099300" cy="9385300"/>
@@ -203,7 +202,7 @@
           <a:p>
             <a:fld id="{934E4385-B8F5-43FD-B87C-23FE0870FB89}" type="datetimeFigureOut">
               <a:rPr lang="en-US" smtClean="0"/>
-              <a:t>12/7/2024</a:t>
+              <a:t>8/16/2026</a:t>
             </a:fld>
             <a:endParaRPr lang="en-US"/>
           </a:p>
@@ -601,7 +600,7 @@
           <a:p>
             <a:fld id="{C25400C8-B2B9-4194-983F-59C10DC16525}" type="datetime1">
               <a:rPr lang="en-US" smtClean="0"/>
-              <a:t>12/7/2024</a:t>
+              <a:t>8/16/2026</a:t>
             </a:fld>
             <a:endParaRPr lang="en-US"/>
           </a:p>
@@ -771,7 +770,7 @@
           <a:p>
             <a:fld id="{3C47742A-5CA3-4EE8-BA7C-F2808549856A}" type="datetime1">
               <a:rPr lang="en-US" smtClean="0"/>
-              <a:t>12/7/2024</a:t>
+              <a:t>8/16/2026</a:t>
             </a:fld>
             <a:endParaRPr lang="en-US"/>
           </a:p>
@@ -951,7 +950,7 @@
           <a:p>
             <a:fld id="{CDE7279F-E19D-4839-8C79-A1B4F812F4EE}" type="datetime1">
               <a:rPr lang="en-US" smtClean="0"/>
-              <a:t>12/7/2024</a:t>
+              <a:t>8/16/2026</a:t>
             </a:fld>
             <a:endParaRPr lang="en-US"/>
           </a:p>
@@ -1121,7 +1120,7 @@
           <a:p>
             <a:fld id="{20B63A4F-BBEC-4CD6-91F8-221E1BABAAF6}" type="datetime1">
               <a:rPr lang="en-US" smtClean="0"/>
-              <a:t>12/7/2024</a:t>
+              <a:t>8/16/2026</a:t>
             </a:fld>
             <a:endParaRPr lang="en-US"/>
           </a:p>
@@ -1367,7 +1366,7 @@
           <a:p>
             <a:fld id="{53E84040-CF0F-4AD3-B829-9017D8AF2931}" type="datetime1">
               <a:rPr lang="en-US" smtClean="0"/>
-              <a:t>12/7/2024</a:t>
+              <a:t>8/16/2026</a:t>
             </a:fld>
             <a:endParaRPr lang="en-US"/>
           </a:p>
@@ -1599,7 +1598,7 @@
           <a:p>
             <a:fld id="{50649116-A918-462E-A3DB-9AFC28A59980}" type="datetime1">
               <a:rPr lang="en-US" smtClean="0"/>
-              <a:t>12/7/2024</a:t>
+              <a:t>8/16/2026</a:t>
             </a:fld>
             <a:endParaRPr lang="en-US"/>
           </a:p>
@@ -1966,7 +1965,7 @@
           <a:p>
             <a:fld id="{04B407E5-C166-4D90-839F-0B22CEAEAE33}" type="datetime1">
               <a:rPr lang="en-US" smtClean="0"/>
-              <a:t>12/7/2024</a:t>
+              <a:t>8/16/2026</a:t>
             </a:fld>
             <a:endParaRPr lang="en-US"/>
           </a:p>
@@ -2084,7 +2083,7 @@
           <a:p>
             <a:fld id="{B999C38C-ADBD-40BE-9C12-40BE280A0101}" type="datetime1">
               <a:rPr lang="en-US" smtClean="0"/>
-              <a:t>12/7/2024</a:t>
+              <a:t>8/16/2026</a:t>
             </a:fld>
             <a:endParaRPr lang="en-US"/>
           </a:p>
@@ -2179,7 +2178,7 @@
           <a:p>
             <a:fld id="{0E570C49-A811-4810-963F-D2ABC7129269}" type="datetime1">
               <a:rPr lang="en-US" smtClean="0"/>
-              <a:t>12/7/2024</a:t>
+              <a:t>8/16/2026</a:t>
             </a:fld>
             <a:endParaRPr lang="en-US"/>
           </a:p>
@@ -2456,7 +2455,7 @@
           <a:p>
             <a:fld id="{9F5499E9-7C7C-4331-ABFA-F00A5B554E2D}" type="datetime1">
               <a:rPr lang="en-US" smtClean="0"/>
-              <a:t>12/7/2024</a:t>
+              <a:t>8/16/2026</a:t>
             </a:fld>
             <a:endParaRPr lang="en-US"/>
           </a:p>
@@ -2713,7 +2712,7 @@
           <a:p>
             <a:fld id="{24929424-DD0F-45DD-A6C1-99ED128F59B8}" type="datetime1">
               <a:rPr lang="en-US" smtClean="0"/>
-              <a:t>12/7/2024</a:t>
+              <a:t>8/16/2026</a:t>
             </a:fld>
             <a:endParaRPr lang="en-US"/>
           </a:p>
@@ -2926,7 +2925,7 @@
           <a:p>
             <a:fld id="{3A85E690-72FD-4AC6-9705-3B8FEAEDEF23}" type="datetime1">
               <a:rPr lang="en-US" smtClean="0"/>
-              <a:t>12/7/2024</a:t>
+              <a:t>8/16/2026</a:t>
             </a:fld>
             <a:endParaRPr lang="en-US"/>
           </a:p>
@@ -3411,8 +3410,8 @@
         </p:nvSpPr>
         <p:spPr>
           <a:xfrm>
-            <a:off x="1581454" y="562372"/>
-            <a:ext cx="7328866" cy="307777"/>
+            <a:off x="852098" y="562372"/>
+            <a:ext cx="7663252" cy="307777"/>
           </a:xfrm>
           <a:prstGeom prst="rect">
             <a:avLst/>
@@ -3431,7 +3430,7 @@
                   <a:srgbClr val="C00000"/>
                 </a:solidFill>
               </a:rPr>
-              <a:t>This example for stepper motor-based monochromator controller project: </a:t>
+              <a:t>Adapted for stepper motor-based monochromator controller project: </a:t>
             </a:r>
             <a:r>
               <a:rPr lang="en-US" sz="1400" dirty="0" err="1">
@@ -3447,7 +3446,7 @@
                   <a:srgbClr val="C00000"/>
                 </a:solidFill>
               </a:rPr>
-              <a:t>-mono-</a:t>
+              <a:t>-</a:t>
             </a:r>
             <a:r>
               <a:rPr lang="en-US" sz="1400" dirty="0" err="1">
@@ -3455,13 +3454,16 @@
                   <a:srgbClr val="C00000"/>
                 </a:solidFill>
               </a:rPr>
-              <a:t>svn</a:t>
-            </a:r>
-            <a:endParaRPr lang="en-US" sz="1400" dirty="0">
-              <a:solidFill>
-                <a:srgbClr val="C00000"/>
-              </a:solidFill>
-            </a:endParaRPr>
+              <a:t>bli</a:t>
+            </a:r>
+            <a:r>
+              <a:rPr lang="en-US" sz="1400" dirty="0">
+                <a:solidFill>
+                  <a:srgbClr val="C00000"/>
+                </a:solidFill>
+              </a:rPr>
+              <a:t>-mono-controller</a:t>
+            </a:r>
           </a:p>
         </p:txBody>
       </p:sp>
@@ -3696,6 +3698,53 @@
             <a:r>
               <a:rPr lang="en-US" sz="1000" dirty="0"/>
               <a:t>All digital inputs are active low, configured as INPUT_PULLUP (supposed to be 20k-50k internal pull-ups to 5V)</a:t>
+            </a:r>
+          </a:p>
+        </p:txBody>
+      </p:sp>
+      <p:sp>
+        <p:nvSpPr>
+          <p:cNvPr id="3" name="TextBox 2">
+            <a:extLst>
+              <a:ext uri="{FF2B5EF4-FFF2-40B4-BE49-F238E27FC236}">
+                <a16:creationId xmlns:a16="http://schemas.microsoft.com/office/drawing/2014/main" id="{06FA4D9E-BC7F-E108-8B17-1940FDA51AAF}"/>
+              </a:ext>
+            </a:extLst>
+          </p:cNvPr>
+          <p:cNvSpPr txBox="1"/>
+          <p:nvPr/>
+        </p:nvSpPr>
+        <p:spPr>
+          <a:xfrm>
+            <a:off x="2218433" y="6380164"/>
+            <a:ext cx="6296917" cy="400110"/>
+          </a:xfrm>
+          <a:prstGeom prst="rect">
+            <a:avLst/>
+          </a:prstGeom>
+          <a:noFill/>
+        </p:spPr>
+        <p:txBody>
+          <a:bodyPr wrap="none" rtlCol="0">
+            <a:spAutoFit/>
+          </a:bodyPr>
+          <a:lstStyle/>
+          <a:p>
+            <a:r>
+              <a:rPr lang="en-US" sz="1000" dirty="0"/>
+              <a:t>Copyright 2026 Andrew B. Greytak, University of South Carolina – Documentation shared via CC-BY-SA-4.0</a:t>
+            </a:r>
+          </a:p>
+          <a:p>
+            <a:r>
+              <a:rPr lang="en-US" sz="1000" dirty="0">
+                <a:hlinkClick r:id="rId3"/>
+              </a:rPr>
+              <a:t>https://github.com/Greytak-Chemistry-Lab/arduino-bli-mono-controller/LICENSE</a:t>
+            </a:r>
+            <a:r>
+              <a:rPr lang="en-US" sz="1000" dirty="0"/>
+              <a:t>  </a:t>
             </a:r>
           </a:p>
         </p:txBody>
@@ -3803,74 +3852,6 @@
       </p:sp>
       <p:sp>
         <p:nvSpPr>
-          <p:cNvPr id="5" name="TextBox 4">
-            <a:extLst>
-              <a:ext uri="{FF2B5EF4-FFF2-40B4-BE49-F238E27FC236}">
-                <a16:creationId xmlns:a16="http://schemas.microsoft.com/office/drawing/2014/main" id="{C2B40512-B413-F195-0AC8-0A4480EA3A8E}"/>
-              </a:ext>
-            </a:extLst>
-          </p:cNvPr>
-          <p:cNvSpPr txBox="1"/>
-          <p:nvPr/>
-        </p:nvSpPr>
-        <p:spPr>
-          <a:xfrm>
-            <a:off x="1581454" y="562372"/>
-            <a:ext cx="7328866" cy="307777"/>
-          </a:xfrm>
-          <a:prstGeom prst="rect">
-            <a:avLst/>
-          </a:prstGeom>
-          <a:noFill/>
-        </p:spPr>
-        <p:txBody>
-          <a:bodyPr wrap="none" rtlCol="0">
-            <a:spAutoFit/>
-          </a:bodyPr>
-          <a:lstStyle/>
-          <a:p>
-            <a:r>
-              <a:rPr lang="en-US" sz="1400" dirty="0">
-                <a:solidFill>
-                  <a:srgbClr val="C00000"/>
-                </a:solidFill>
-              </a:rPr>
-              <a:t>This example for stepper motor-based monochromator controller project: </a:t>
-            </a:r>
-            <a:r>
-              <a:rPr lang="en-US" sz="1400" dirty="0" err="1">
-                <a:solidFill>
-                  <a:srgbClr val="C00000"/>
-                </a:solidFill>
-              </a:rPr>
-              <a:t>arduino</a:t>
-            </a:r>
-            <a:r>
-              <a:rPr lang="en-US" sz="1400" dirty="0">
-                <a:solidFill>
-                  <a:srgbClr val="C00000"/>
-                </a:solidFill>
-              </a:rPr>
-              <a:t>-mono-</a:t>
-            </a:r>
-            <a:r>
-              <a:rPr lang="en-US" sz="1400" dirty="0" err="1">
-                <a:solidFill>
-                  <a:srgbClr val="C00000"/>
-                </a:solidFill>
-              </a:rPr>
-              <a:t>svn</a:t>
-            </a:r>
-            <a:endParaRPr lang="en-US" sz="1400" dirty="0">
-              <a:solidFill>
-                <a:srgbClr val="C00000"/>
-              </a:solidFill>
-            </a:endParaRPr>
-          </a:p>
-        </p:txBody>
-      </p:sp>
-      <p:sp>
-        <p:nvSpPr>
           <p:cNvPr id="9" name="TextBox 8">
             <a:extLst>
               <a:ext uri="{FF2B5EF4-FFF2-40B4-BE49-F238E27FC236}">
@@ -4105,6 +4086,53 @@
             <a:r>
               <a:rPr lang="en-US" sz="1000" dirty="0"/>
               <a:t>All digital inputs are active low, configured as INPUT_PULLUP (supposed to be 20k-50k internal pull-ups to 5V)</a:t>
+            </a:r>
+          </a:p>
+        </p:txBody>
+      </p:sp>
+      <p:sp>
+        <p:nvSpPr>
+          <p:cNvPr id="7" name="TextBox 6">
+            <a:extLst>
+              <a:ext uri="{FF2B5EF4-FFF2-40B4-BE49-F238E27FC236}">
+                <a16:creationId xmlns:a16="http://schemas.microsoft.com/office/drawing/2014/main" id="{208C9C3A-198F-7C89-7EE8-04CCDD83DE1D}"/>
+              </a:ext>
+            </a:extLst>
+          </p:cNvPr>
+          <p:cNvSpPr txBox="1"/>
+          <p:nvPr/>
+        </p:nvSpPr>
+        <p:spPr>
+          <a:xfrm>
+            <a:off x="2218433" y="6380164"/>
+            <a:ext cx="6296917" cy="400110"/>
+          </a:xfrm>
+          <a:prstGeom prst="rect">
+            <a:avLst/>
+          </a:prstGeom>
+          <a:noFill/>
+        </p:spPr>
+        <p:txBody>
+          <a:bodyPr wrap="none" rtlCol="0">
+            <a:spAutoFit/>
+          </a:bodyPr>
+          <a:lstStyle/>
+          <a:p>
+            <a:r>
+              <a:rPr lang="en-US" sz="1000" dirty="0"/>
+              <a:t>Copyright 2026 Andrew B. Greytak, University of South Carolina – Documentation shared via CC-BY-SA-4.0</a:t>
+            </a:r>
+          </a:p>
+          <a:p>
+            <a:r>
+              <a:rPr lang="en-US" sz="1000" dirty="0">
+                <a:hlinkClick r:id="rId3"/>
+              </a:rPr>
+              <a:t>https://github.com/Greytak-Chemistry-Lab/arduino-bli-mono-controller/LICENSE</a:t>
+            </a:r>
+            <a:r>
+              <a:rPr lang="en-US" sz="1000" dirty="0"/>
+              <a:t>  </a:t>
             </a:r>
           </a:p>
         </p:txBody>
@@ -4123,415 +4151,6 @@
 </file>
 
 <file path=ppt/slides/slide3.xml><?xml version="1.0" encoding="utf-8"?>
-<p:sld xmlns:a="http://schemas.openxmlformats.org/drawingml/2006/main" xmlns:r="http://schemas.openxmlformats.org/officeDocument/2006/relationships" xmlns:p="http://schemas.openxmlformats.org/presentationml/2006/main">
-  <p:cSld>
-    <p:spTree>
-      <p:nvGrpSpPr>
-        <p:cNvPr id="1" name="">
-          <a:extLst>
-            <a:ext uri="{FF2B5EF4-FFF2-40B4-BE49-F238E27FC236}">
-              <a16:creationId xmlns:a16="http://schemas.microsoft.com/office/drawing/2014/main" id="{9DE33CEF-48A1-80E4-CF41-A89471E269A0}"/>
-            </a:ext>
-          </a:extLst>
-        </p:cNvPr>
-        <p:cNvGrpSpPr/>
-        <p:nvPr/>
-      </p:nvGrpSpPr>
-      <p:grpSpPr>
-        <a:xfrm>
-          <a:off x="0" y="0"/>
-          <a:ext cx="0" cy="0"/>
-          <a:chOff x="0" y="0"/>
-          <a:chExt cx="0" cy="0"/>
-        </a:xfrm>
-      </p:grpSpPr>
-      <p:sp>
-        <p:nvSpPr>
-          <p:cNvPr id="4" name="TextBox 3">
-            <a:extLst>
-              <a:ext uri="{FF2B5EF4-FFF2-40B4-BE49-F238E27FC236}">
-                <a16:creationId xmlns:a16="http://schemas.microsoft.com/office/drawing/2014/main" id="{2529B678-1DE3-8E51-1538-F30D55FF66F1}"/>
-              </a:ext>
-            </a:extLst>
-          </p:cNvPr>
-          <p:cNvSpPr txBox="1"/>
-          <p:nvPr/>
-        </p:nvSpPr>
-        <p:spPr>
-          <a:xfrm>
-            <a:off x="233680" y="193040"/>
-            <a:ext cx="6637907" cy="369332"/>
-          </a:xfrm>
-          <a:prstGeom prst="rect">
-            <a:avLst/>
-          </a:prstGeom>
-          <a:noFill/>
-        </p:spPr>
-        <p:txBody>
-          <a:bodyPr wrap="none" rtlCol="0">
-            <a:spAutoFit/>
-          </a:bodyPr>
-          <a:lstStyle/>
-          <a:p>
-            <a:r>
-              <a:rPr lang="en-US" dirty="0"/>
-              <a:t>Hardware layout for modular Arduino lab instrument, Greytak lab </a:t>
-            </a:r>
-          </a:p>
-        </p:txBody>
-      </p:sp>
-      <p:sp>
-        <p:nvSpPr>
-          <p:cNvPr id="5" name="TextBox 4">
-            <a:extLst>
-              <a:ext uri="{FF2B5EF4-FFF2-40B4-BE49-F238E27FC236}">
-                <a16:creationId xmlns:a16="http://schemas.microsoft.com/office/drawing/2014/main" id="{B31EEBE8-8E33-132F-02DA-D6A2AF17B547}"/>
-              </a:ext>
-            </a:extLst>
-          </p:cNvPr>
-          <p:cNvSpPr txBox="1"/>
-          <p:nvPr/>
-        </p:nvSpPr>
-        <p:spPr>
-          <a:xfrm>
-            <a:off x="1581454" y="562372"/>
-            <a:ext cx="7328866" cy="307777"/>
-          </a:xfrm>
-          <a:prstGeom prst="rect">
-            <a:avLst/>
-          </a:prstGeom>
-          <a:noFill/>
-        </p:spPr>
-        <p:txBody>
-          <a:bodyPr wrap="none" rtlCol="0">
-            <a:spAutoFit/>
-          </a:bodyPr>
-          <a:lstStyle/>
-          <a:p>
-            <a:r>
-              <a:rPr lang="en-US" sz="1400" dirty="0">
-                <a:solidFill>
-                  <a:srgbClr val="C00000"/>
-                </a:solidFill>
-              </a:rPr>
-              <a:t>This example for stepper motor-based monochromator controller project: </a:t>
-            </a:r>
-            <a:r>
-              <a:rPr lang="en-US" sz="1400" dirty="0" err="1">
-                <a:solidFill>
-                  <a:srgbClr val="C00000"/>
-                </a:solidFill>
-              </a:rPr>
-              <a:t>arduino</a:t>
-            </a:r>
-            <a:r>
-              <a:rPr lang="en-US" sz="1400" dirty="0">
-                <a:solidFill>
-                  <a:srgbClr val="C00000"/>
-                </a:solidFill>
-              </a:rPr>
-              <a:t>-mono-</a:t>
-            </a:r>
-            <a:r>
-              <a:rPr lang="en-US" sz="1400" dirty="0" err="1">
-                <a:solidFill>
-                  <a:srgbClr val="C00000"/>
-                </a:solidFill>
-              </a:rPr>
-              <a:t>svn</a:t>
-            </a:r>
-            <a:endParaRPr lang="en-US" sz="1400" dirty="0">
-              <a:solidFill>
-                <a:srgbClr val="C00000"/>
-              </a:solidFill>
-            </a:endParaRPr>
-          </a:p>
-        </p:txBody>
-      </p:sp>
-      <p:sp>
-        <p:nvSpPr>
-          <p:cNvPr id="9" name="TextBox 8">
-            <a:extLst>
-              <a:ext uri="{FF2B5EF4-FFF2-40B4-BE49-F238E27FC236}">
-                <a16:creationId xmlns:a16="http://schemas.microsoft.com/office/drawing/2014/main" id="{BB530B56-681D-C934-F0E4-7E3E3FF384A8}"/>
-              </a:ext>
-            </a:extLst>
-          </p:cNvPr>
-          <p:cNvSpPr txBox="1"/>
-          <p:nvPr/>
-        </p:nvSpPr>
-        <p:spPr>
-          <a:xfrm>
-            <a:off x="304800" y="1107440"/>
-            <a:ext cx="3618614" cy="1631216"/>
-          </a:xfrm>
-          <a:prstGeom prst="rect">
-            <a:avLst/>
-          </a:prstGeom>
-          <a:noFill/>
-        </p:spPr>
-        <p:txBody>
-          <a:bodyPr wrap="square" rtlCol="0">
-            <a:spAutoFit/>
-          </a:bodyPr>
-          <a:lstStyle/>
-          <a:p>
-            <a:r>
-              <a:rPr lang="en-US" sz="1000" dirty="0"/>
-              <a:t>Digital pins 2-7: LCD output</a:t>
-            </a:r>
-          </a:p>
-          <a:p>
-            <a:r>
-              <a:rPr lang="en-US" sz="1000" dirty="0"/>
-              <a:t>Analog inputs A0-A5 (pins 15-19): Inputs</a:t>
-            </a:r>
-          </a:p>
-          <a:p>
-            <a:pPr lvl="1"/>
-            <a:r>
-              <a:rPr lang="en-US" sz="1000" dirty="0"/>
-              <a:t>A0-A3: pushbuttons</a:t>
-            </a:r>
-          </a:p>
-          <a:p>
-            <a:pPr lvl="1"/>
-            <a:r>
-              <a:rPr lang="en-US" sz="1000" dirty="0"/>
-              <a:t>A5: toggle switch (mode switch)</a:t>
-            </a:r>
-          </a:p>
-          <a:p>
-            <a:pPr lvl="1"/>
-            <a:r>
-              <a:rPr lang="en-US" sz="1000" dirty="0"/>
-              <a:t>A4: available (used for limit switch)</a:t>
-            </a:r>
-          </a:p>
-          <a:p>
-            <a:r>
-              <a:rPr lang="en-US" sz="1000" dirty="0"/>
-              <a:t>Pin 13: LED/TTL output</a:t>
-            </a:r>
-          </a:p>
-          <a:p>
-            <a:r>
-              <a:rPr lang="en-US" sz="1000" dirty="0"/>
-              <a:t>Pins 8-12: available (used for stepper motor control)</a:t>
-            </a:r>
-          </a:p>
-          <a:p>
-            <a:r>
-              <a:rPr lang="en-US" sz="1000" dirty="0"/>
-              <a:t>Pins 0-1: unused</a:t>
-            </a:r>
-          </a:p>
-          <a:p>
-            <a:endParaRPr lang="en-US" sz="1000" dirty="0"/>
-          </a:p>
-          <a:p>
-            <a:endParaRPr lang="en-US" sz="1000" dirty="0"/>
-          </a:p>
-        </p:txBody>
-      </p:sp>
-      <p:sp>
-        <p:nvSpPr>
-          <p:cNvPr id="12" name="Slide Number Placeholder 11">
-            <a:extLst>
-              <a:ext uri="{FF2B5EF4-FFF2-40B4-BE49-F238E27FC236}">
-                <a16:creationId xmlns:a16="http://schemas.microsoft.com/office/drawing/2014/main" id="{E439790D-AFCC-B384-1BDE-8198236ED640}"/>
-              </a:ext>
-            </a:extLst>
-          </p:cNvPr>
-          <p:cNvSpPr>
-            <a:spLocks noGrp="1"/>
-          </p:cNvSpPr>
-          <p:nvPr>
-            <p:ph type="sldNum" sz="quarter" idx="12"/>
-          </p:nvPr>
-        </p:nvSpPr>
-        <p:spPr/>
-        <p:txBody>
-          <a:bodyPr/>
-          <a:lstStyle/>
-          <a:p>
-            <a:fld id="{EBFD857F-9F30-4CA0-835C-0D438159FA5B}" type="slidenum">
-              <a:rPr lang="en-US" smtClean="0"/>
-              <a:t>3</a:t>
-            </a:fld>
-            <a:endParaRPr lang="en-US"/>
-          </a:p>
-        </p:txBody>
-      </p:sp>
-      <p:sp>
-        <p:nvSpPr>
-          <p:cNvPr id="13" name="TextBox 12">
-            <a:extLst>
-              <a:ext uri="{FF2B5EF4-FFF2-40B4-BE49-F238E27FC236}">
-                <a16:creationId xmlns:a16="http://schemas.microsoft.com/office/drawing/2014/main" id="{756E2A53-148F-CAF5-4952-8E75EDE6D34F}"/>
-              </a:ext>
-            </a:extLst>
-          </p:cNvPr>
-          <p:cNvSpPr txBox="1"/>
-          <p:nvPr/>
-        </p:nvSpPr>
-        <p:spPr>
-          <a:xfrm>
-            <a:off x="4136065" y="1107440"/>
-            <a:ext cx="3686458" cy="369332"/>
-          </a:xfrm>
-          <a:prstGeom prst="rect">
-            <a:avLst/>
-          </a:prstGeom>
-          <a:noFill/>
-        </p:spPr>
-        <p:txBody>
-          <a:bodyPr wrap="none" rtlCol="0">
-            <a:spAutoFit/>
-          </a:bodyPr>
-          <a:lstStyle/>
-          <a:p>
-            <a:r>
-              <a:rPr lang="en-US" dirty="0"/>
-              <a:t>Breadboard implementation: photo</a:t>
-            </a:r>
-          </a:p>
-        </p:txBody>
-      </p:sp>
-      <p:pic>
-        <p:nvPicPr>
-          <p:cNvPr id="6" name="Picture 5" descr="A person's lap top with electronics&#10;&#10;Description automatically generated">
-            <a:extLst>
-              <a:ext uri="{FF2B5EF4-FFF2-40B4-BE49-F238E27FC236}">
-                <a16:creationId xmlns:a16="http://schemas.microsoft.com/office/drawing/2014/main" id="{06A86C89-0F37-5DB1-2C41-B80B2653E257}"/>
-              </a:ext>
-            </a:extLst>
-          </p:cNvPr>
-          <p:cNvPicPr>
-            <a:picLocks noChangeAspect="1"/>
-          </p:cNvPicPr>
-          <p:nvPr/>
-        </p:nvPicPr>
-        <p:blipFill>
-          <a:blip r:embed="rId2">
-            <a:extLst>
-              <a:ext uri="{28A0092B-C50C-407E-A947-70E740481C1C}">
-                <a14:useLocalDpi xmlns:a14="http://schemas.microsoft.com/office/drawing/2010/main" val="0"/>
-              </a:ext>
-            </a:extLst>
-          </a:blip>
-          <a:srcRect l="19120" r="17677"/>
-          <a:stretch/>
-        </p:blipFill>
-        <p:spPr>
-          <a:xfrm>
-            <a:off x="3552633" y="1494264"/>
-            <a:ext cx="4389888" cy="5209233"/>
-          </a:xfrm>
-          <a:prstGeom prst="rect">
-            <a:avLst/>
-          </a:prstGeom>
-        </p:spPr>
-      </p:pic>
-      <p:sp>
-        <p:nvSpPr>
-          <p:cNvPr id="7" name="TextBox 6">
-            <a:extLst>
-              <a:ext uri="{FF2B5EF4-FFF2-40B4-BE49-F238E27FC236}">
-                <a16:creationId xmlns:a16="http://schemas.microsoft.com/office/drawing/2014/main" id="{D0B003DC-C252-6A3E-8C8D-66A3BA3C40D1}"/>
-              </a:ext>
-            </a:extLst>
-          </p:cNvPr>
-          <p:cNvSpPr txBox="1"/>
-          <p:nvPr/>
-        </p:nvSpPr>
-        <p:spPr>
-          <a:xfrm>
-            <a:off x="304800" y="2446521"/>
-            <a:ext cx="2119423" cy="2554545"/>
-          </a:xfrm>
-          <a:prstGeom prst="rect">
-            <a:avLst/>
-          </a:prstGeom>
-          <a:noFill/>
-        </p:spPr>
-        <p:txBody>
-          <a:bodyPr wrap="square" rtlCol="0">
-            <a:spAutoFit/>
-          </a:bodyPr>
-          <a:lstStyle/>
-          <a:p>
-            <a:r>
-              <a:rPr lang="en-US" sz="1000" dirty="0"/>
-              <a:t>Idea is: </a:t>
-            </a:r>
-          </a:p>
-          <a:p>
-            <a:pPr marL="285750" indent="-285750">
-              <a:buFontTx/>
-              <a:buChar char="-"/>
-            </a:pPr>
-            <a:r>
-              <a:rPr lang="en-US" sz="1000" dirty="0"/>
-              <a:t>power, input “bus”, and LED out goes to button panel</a:t>
-            </a:r>
-          </a:p>
-          <a:p>
-            <a:pPr marL="285750" indent="-285750">
-              <a:buFontTx/>
-              <a:buChar char="-"/>
-            </a:pPr>
-            <a:r>
-              <a:rPr lang="en-US" sz="1000" dirty="0"/>
-              <a:t>LCD panel is powered from button panel</a:t>
-            </a:r>
-          </a:p>
-          <a:p>
-            <a:pPr marL="285750" indent="-285750">
-              <a:buFontTx/>
-              <a:buChar char="-"/>
-            </a:pPr>
-            <a:r>
-              <a:rPr lang="en-US" sz="1000" dirty="0"/>
-              <a:t>Additional inputs can be connected to the input “bus” via peripheral connections to the button panel</a:t>
-            </a:r>
-          </a:p>
-          <a:p>
-            <a:pPr marL="285750" indent="-285750">
-              <a:buFontTx/>
-              <a:buChar char="-"/>
-            </a:pPr>
-            <a:r>
-              <a:rPr lang="en-US" sz="1000" dirty="0"/>
-              <a:t>The “mode” toggle switch is one such peripheral input</a:t>
-            </a:r>
-          </a:p>
-          <a:p>
-            <a:pPr marL="285750" indent="-285750">
-              <a:buFontTx/>
-              <a:buChar char="-"/>
-            </a:pPr>
-            <a:r>
-              <a:rPr lang="en-US" sz="1000" dirty="0"/>
-              <a:t>All digital inputs are active low, configured as INPUT_PULLUP (supposed to be 20k-50k internal pull-ups to 5V)</a:t>
-            </a:r>
-          </a:p>
-        </p:txBody>
-      </p:sp>
-    </p:spTree>
-    <p:extLst>
-      <p:ext uri="{BB962C8B-B14F-4D97-AF65-F5344CB8AC3E}">
-        <p14:creationId xmlns:p14="http://schemas.microsoft.com/office/powerpoint/2010/main" val="4021882512"/>
-      </p:ext>
-    </p:extLst>
-  </p:cSld>
-  <p:clrMapOvr>
-    <a:masterClrMapping/>
-  </p:clrMapOvr>
-</p:sld>
-</file>
-
-<file path=ppt/slides/slide4.xml><?xml version="1.0" encoding="utf-8"?>
 <p:sld xmlns:a="http://schemas.openxmlformats.org/drawingml/2006/main" xmlns:r="http://schemas.openxmlformats.org/officeDocument/2006/relationships" xmlns:p="http://schemas.openxmlformats.org/presentationml/2006/main">
   <p:cSld>
     <p:spTree>
@@ -4627,74 +4246,6 @@
       </p:sp>
       <p:sp>
         <p:nvSpPr>
-          <p:cNvPr id="5" name="TextBox 4">
-            <a:extLst>
-              <a:ext uri="{FF2B5EF4-FFF2-40B4-BE49-F238E27FC236}">
-                <a16:creationId xmlns:a16="http://schemas.microsoft.com/office/drawing/2014/main" id="{522953B6-F0BD-BA69-13BF-70DFEF763D9E}"/>
-              </a:ext>
-            </a:extLst>
-          </p:cNvPr>
-          <p:cNvSpPr txBox="1"/>
-          <p:nvPr/>
-        </p:nvSpPr>
-        <p:spPr>
-          <a:xfrm>
-            <a:off x="1581454" y="562372"/>
-            <a:ext cx="7328866" cy="307777"/>
-          </a:xfrm>
-          <a:prstGeom prst="rect">
-            <a:avLst/>
-          </a:prstGeom>
-          <a:noFill/>
-        </p:spPr>
-        <p:txBody>
-          <a:bodyPr wrap="none" rtlCol="0">
-            <a:spAutoFit/>
-          </a:bodyPr>
-          <a:lstStyle/>
-          <a:p>
-            <a:r>
-              <a:rPr lang="en-US" sz="1400" dirty="0">
-                <a:solidFill>
-                  <a:srgbClr val="C00000"/>
-                </a:solidFill>
-              </a:rPr>
-              <a:t>This example for stepper motor-based monochromator controller project: </a:t>
-            </a:r>
-            <a:r>
-              <a:rPr lang="en-US" sz="1400" dirty="0" err="1">
-                <a:solidFill>
-                  <a:srgbClr val="C00000"/>
-                </a:solidFill>
-              </a:rPr>
-              <a:t>arduino</a:t>
-            </a:r>
-            <a:r>
-              <a:rPr lang="en-US" sz="1400" dirty="0">
-                <a:solidFill>
-                  <a:srgbClr val="C00000"/>
-                </a:solidFill>
-              </a:rPr>
-              <a:t>-mono-</a:t>
-            </a:r>
-            <a:r>
-              <a:rPr lang="en-US" sz="1400" dirty="0" err="1">
-                <a:solidFill>
-                  <a:srgbClr val="C00000"/>
-                </a:solidFill>
-              </a:rPr>
-              <a:t>svn</a:t>
-            </a:r>
-            <a:endParaRPr lang="en-US" sz="1400" dirty="0">
-              <a:solidFill>
-                <a:srgbClr val="C00000"/>
-              </a:solidFill>
-            </a:endParaRPr>
-          </a:p>
-        </p:txBody>
-      </p:sp>
-      <p:sp>
-        <p:nvSpPr>
           <p:cNvPr id="9" name="TextBox 8">
             <a:extLst>
               <a:ext uri="{FF2B5EF4-FFF2-40B4-BE49-F238E27FC236}">
@@ -4802,7 +4353,7 @@
           <a:p>
             <a:fld id="{EBFD857F-9F30-4CA0-835C-0D438159FA5B}" type="slidenum">
               <a:rPr lang="en-US" smtClean="0"/>
-              <a:t>4</a:t>
+              <a:t>3</a:t>
             </a:fld>
             <a:endParaRPr lang="en-US"/>
           </a:p>
@@ -4845,15 +4396,7 @@
           <a:p>
             <a:r>
               <a:rPr lang="en-US" sz="1000" dirty="0"/>
-              <a:t>(rendered in Fritzing, but it doesn’t understand two-sided perf boards, so we manually include views from front and back: some components are shown on both sides to illustrate where they are located. Fritzing also does not render right-angle headers. The LCD panel has right-angle male headers for signal connection, so it can be plugged </a:t>
-            </a:r>
-            <a:r>
-              <a:rPr lang="en-US" sz="1000" dirty="0" err="1"/>
-              <a:t>directely</a:t>
-            </a:r>
-            <a:r>
-              <a:rPr lang="en-US" sz="1000" dirty="0"/>
-              <a:t> into the Arduino if desired, and both RA male and standing female headers for power) </a:t>
+              <a:t>(rendered in Fritzing, but it doesn’t understand two-sided perf boards, so we manually include views from front and back: some components are shown on both sides to illustrate where they are located. Fritzing also does not render right-angle headers. The LCD panel has right-angle male headers for signal connection, so it can be plugged directly into the Arduino if desired for testing, and can use RA male and/or standing female headers for power) </a:t>
             </a:r>
           </a:p>
         </p:txBody>
@@ -5426,6 +4969,53 @@
           </a:p>
         </p:txBody>
       </p:sp>
+      <p:sp>
+        <p:nvSpPr>
+          <p:cNvPr id="6" name="TextBox 5">
+            <a:extLst>
+              <a:ext uri="{FF2B5EF4-FFF2-40B4-BE49-F238E27FC236}">
+                <a16:creationId xmlns:a16="http://schemas.microsoft.com/office/drawing/2014/main" id="{4FEC906F-E283-4C12-0431-08EF61BAB204}"/>
+              </a:ext>
+            </a:extLst>
+          </p:cNvPr>
+          <p:cNvSpPr txBox="1"/>
+          <p:nvPr/>
+        </p:nvSpPr>
+        <p:spPr>
+          <a:xfrm>
+            <a:off x="2218433" y="6380164"/>
+            <a:ext cx="6296917" cy="400110"/>
+          </a:xfrm>
+          <a:prstGeom prst="rect">
+            <a:avLst/>
+          </a:prstGeom>
+          <a:noFill/>
+        </p:spPr>
+        <p:txBody>
+          <a:bodyPr wrap="none" rtlCol="0">
+            <a:spAutoFit/>
+          </a:bodyPr>
+          <a:lstStyle/>
+          <a:p>
+            <a:r>
+              <a:rPr lang="en-US" sz="1000" dirty="0"/>
+              <a:t>Copyright 2026 Andrew B. Greytak, University of South Carolina – Documentation shared via CC-BY-SA-4.0</a:t>
+            </a:r>
+          </a:p>
+          <a:p>
+            <a:r>
+              <a:rPr lang="en-US" sz="1000" dirty="0">
+                <a:hlinkClick r:id="rId4"/>
+              </a:rPr>
+              <a:t>https://github.com/Greytak-Chemistry-Lab/arduino-bli-mono-controller/LICENSE</a:t>
+            </a:r>
+            <a:r>
+              <a:rPr lang="en-US" sz="1000" dirty="0"/>
+              <a:t>  </a:t>
+            </a:r>
+          </a:p>
+        </p:txBody>
+      </p:sp>
     </p:spTree>
     <p:extLst>
       <p:ext uri="{BB962C8B-B14F-4D97-AF65-F5344CB8AC3E}">
@@ -5439,545 +5029,7 @@
 </p:sld>
 </file>
 
-<file path=ppt/slides/slide5.xml><?xml version="1.0" encoding="utf-8"?>
-<p:sld xmlns:a="http://schemas.openxmlformats.org/drawingml/2006/main" xmlns:r="http://schemas.openxmlformats.org/officeDocument/2006/relationships" xmlns:p="http://schemas.openxmlformats.org/presentationml/2006/main">
-  <p:cSld>
-    <p:spTree>
-      <p:nvGrpSpPr>
-        <p:cNvPr id="1" name="">
-          <a:extLst>
-            <a:ext uri="{FF2B5EF4-FFF2-40B4-BE49-F238E27FC236}">
-              <a16:creationId xmlns:a16="http://schemas.microsoft.com/office/drawing/2014/main" id="{87FBD8C8-94E0-A094-40C0-F2E66C6F6119}"/>
-            </a:ext>
-          </a:extLst>
-        </p:cNvPr>
-        <p:cNvGrpSpPr/>
-        <p:nvPr/>
-      </p:nvGrpSpPr>
-      <p:grpSpPr>
-        <a:xfrm>
-          <a:off x="0" y="0"/>
-          <a:ext cx="0" cy="0"/>
-          <a:chOff x="0" y="0"/>
-          <a:chExt cx="0" cy="0"/>
-        </a:xfrm>
-      </p:grpSpPr>
-      <p:pic>
-        <p:nvPicPr>
-          <p:cNvPr id="3" name="Picture 2">
-            <a:extLst>
-              <a:ext uri="{FF2B5EF4-FFF2-40B4-BE49-F238E27FC236}">
-                <a16:creationId xmlns:a16="http://schemas.microsoft.com/office/drawing/2014/main" id="{DE2C25E9-C621-C4FD-712A-12B7500C5C1D}"/>
-              </a:ext>
-            </a:extLst>
-          </p:cNvPr>
-          <p:cNvPicPr>
-            <a:picLocks noChangeAspect="1"/>
-          </p:cNvPicPr>
-          <p:nvPr/>
-        </p:nvPicPr>
-        <p:blipFill>
-          <a:blip r:embed="rId2">
-            <a:extLst>
-              <a:ext uri="{28A0092B-C50C-407E-A947-70E740481C1C}">
-                <a14:useLocalDpi xmlns:a14="http://schemas.microsoft.com/office/drawing/2010/main" val="0"/>
-              </a:ext>
-            </a:extLst>
-          </a:blip>
-          <a:srcRect/>
-          <a:stretch/>
-        </p:blipFill>
-        <p:spPr>
-          <a:xfrm>
-            <a:off x="3049222" y="3069964"/>
-            <a:ext cx="5023426" cy="2896026"/>
-          </a:xfrm>
-          <a:prstGeom prst="rect">
-            <a:avLst/>
-          </a:prstGeom>
-        </p:spPr>
-      </p:pic>
-      <p:sp>
-        <p:nvSpPr>
-          <p:cNvPr id="4" name="TextBox 3">
-            <a:extLst>
-              <a:ext uri="{FF2B5EF4-FFF2-40B4-BE49-F238E27FC236}">
-                <a16:creationId xmlns:a16="http://schemas.microsoft.com/office/drawing/2014/main" id="{17C60BB5-4D4D-B278-7620-31E34DA0062B}"/>
-              </a:ext>
-            </a:extLst>
-          </p:cNvPr>
-          <p:cNvSpPr txBox="1"/>
-          <p:nvPr/>
-        </p:nvSpPr>
-        <p:spPr>
-          <a:xfrm>
-            <a:off x="233680" y="193040"/>
-            <a:ext cx="6637907" cy="369332"/>
-          </a:xfrm>
-          <a:prstGeom prst="rect">
-            <a:avLst/>
-          </a:prstGeom>
-          <a:noFill/>
-        </p:spPr>
-        <p:txBody>
-          <a:bodyPr wrap="none" rtlCol="0">
-            <a:spAutoFit/>
-          </a:bodyPr>
-          <a:lstStyle/>
-          <a:p>
-            <a:r>
-              <a:rPr lang="en-US" dirty="0"/>
-              <a:t>Hardware layout for modular Arduino lab instrument, Greytak lab </a:t>
-            </a:r>
-          </a:p>
-        </p:txBody>
-      </p:sp>
-      <p:sp>
-        <p:nvSpPr>
-          <p:cNvPr id="5" name="TextBox 4">
-            <a:extLst>
-              <a:ext uri="{FF2B5EF4-FFF2-40B4-BE49-F238E27FC236}">
-                <a16:creationId xmlns:a16="http://schemas.microsoft.com/office/drawing/2014/main" id="{A87F49D9-0DE5-CAA9-F26E-E346D1FFB5DA}"/>
-              </a:ext>
-            </a:extLst>
-          </p:cNvPr>
-          <p:cNvSpPr txBox="1"/>
-          <p:nvPr/>
-        </p:nvSpPr>
-        <p:spPr>
-          <a:xfrm>
-            <a:off x="1581454" y="562372"/>
-            <a:ext cx="7328866" cy="307777"/>
-          </a:xfrm>
-          <a:prstGeom prst="rect">
-            <a:avLst/>
-          </a:prstGeom>
-          <a:noFill/>
-        </p:spPr>
-        <p:txBody>
-          <a:bodyPr wrap="none" rtlCol="0">
-            <a:spAutoFit/>
-          </a:bodyPr>
-          <a:lstStyle/>
-          <a:p>
-            <a:r>
-              <a:rPr lang="en-US" sz="1400" dirty="0">
-                <a:solidFill>
-                  <a:srgbClr val="C00000"/>
-                </a:solidFill>
-              </a:rPr>
-              <a:t>This example for stepper motor-based monochromator controller project: </a:t>
-            </a:r>
-            <a:r>
-              <a:rPr lang="en-US" sz="1400" dirty="0" err="1">
-                <a:solidFill>
-                  <a:srgbClr val="C00000"/>
-                </a:solidFill>
-              </a:rPr>
-              <a:t>arduino</a:t>
-            </a:r>
-            <a:r>
-              <a:rPr lang="en-US" sz="1400" dirty="0">
-                <a:solidFill>
-                  <a:srgbClr val="C00000"/>
-                </a:solidFill>
-              </a:rPr>
-              <a:t>-mono-</a:t>
-            </a:r>
-            <a:r>
-              <a:rPr lang="en-US" sz="1400" dirty="0" err="1">
-                <a:solidFill>
-                  <a:srgbClr val="C00000"/>
-                </a:solidFill>
-              </a:rPr>
-              <a:t>svn</a:t>
-            </a:r>
-            <a:endParaRPr lang="en-US" sz="1400" dirty="0">
-              <a:solidFill>
-                <a:srgbClr val="C00000"/>
-              </a:solidFill>
-            </a:endParaRPr>
-          </a:p>
-        </p:txBody>
-      </p:sp>
-      <p:sp>
-        <p:nvSpPr>
-          <p:cNvPr id="9" name="TextBox 8">
-            <a:extLst>
-              <a:ext uri="{FF2B5EF4-FFF2-40B4-BE49-F238E27FC236}">
-                <a16:creationId xmlns:a16="http://schemas.microsoft.com/office/drawing/2014/main" id="{5F7F22D9-CB89-2F5C-6857-9A526C4A8C98}"/>
-              </a:ext>
-            </a:extLst>
-          </p:cNvPr>
-          <p:cNvSpPr txBox="1"/>
-          <p:nvPr/>
-        </p:nvSpPr>
-        <p:spPr>
-          <a:xfrm>
-            <a:off x="304800" y="1107440"/>
-            <a:ext cx="3618614" cy="1631216"/>
-          </a:xfrm>
-          <a:prstGeom prst="rect">
-            <a:avLst/>
-          </a:prstGeom>
-          <a:noFill/>
-        </p:spPr>
-        <p:txBody>
-          <a:bodyPr wrap="square" rtlCol="0">
-            <a:spAutoFit/>
-          </a:bodyPr>
-          <a:lstStyle/>
-          <a:p>
-            <a:r>
-              <a:rPr lang="en-US" sz="1000" dirty="0"/>
-              <a:t>Digital pins 2-7: LCD output</a:t>
-            </a:r>
-          </a:p>
-          <a:p>
-            <a:r>
-              <a:rPr lang="en-US" sz="1000" dirty="0"/>
-              <a:t>Analog inputs A0-A5 (pins 15-19): Inputs</a:t>
-            </a:r>
-          </a:p>
-          <a:p>
-            <a:pPr lvl="1"/>
-            <a:r>
-              <a:rPr lang="en-US" sz="1000" dirty="0"/>
-              <a:t>A0-A3: pushbuttons</a:t>
-            </a:r>
-          </a:p>
-          <a:p>
-            <a:pPr lvl="1"/>
-            <a:r>
-              <a:rPr lang="en-US" sz="1000" dirty="0"/>
-              <a:t>A5: toggle switch (mode switch)</a:t>
-            </a:r>
-          </a:p>
-          <a:p>
-            <a:pPr lvl="1"/>
-            <a:r>
-              <a:rPr lang="en-US" sz="1000" dirty="0"/>
-              <a:t>A4: available (used for limit switch)</a:t>
-            </a:r>
-          </a:p>
-          <a:p>
-            <a:r>
-              <a:rPr lang="en-US" sz="1000" dirty="0"/>
-              <a:t>Pin 13: LED/TTL output</a:t>
-            </a:r>
-          </a:p>
-          <a:p>
-            <a:r>
-              <a:rPr lang="en-US" sz="1000" dirty="0"/>
-              <a:t>Pins 8-12: available (used for stepper motor control)</a:t>
-            </a:r>
-          </a:p>
-          <a:p>
-            <a:r>
-              <a:rPr lang="en-US" sz="1000" dirty="0"/>
-              <a:t>Pins 0-1: unused</a:t>
-            </a:r>
-          </a:p>
-          <a:p>
-            <a:endParaRPr lang="en-US" sz="1000" dirty="0"/>
-          </a:p>
-          <a:p>
-            <a:endParaRPr lang="en-US" sz="1000" dirty="0"/>
-          </a:p>
-        </p:txBody>
-      </p:sp>
-      <p:sp>
-        <p:nvSpPr>
-          <p:cNvPr id="12" name="Slide Number Placeholder 11">
-            <a:extLst>
-              <a:ext uri="{FF2B5EF4-FFF2-40B4-BE49-F238E27FC236}">
-                <a16:creationId xmlns:a16="http://schemas.microsoft.com/office/drawing/2014/main" id="{229304A2-F21F-A3CA-3B1D-B2E46EBC447A}"/>
-              </a:ext>
-            </a:extLst>
-          </p:cNvPr>
-          <p:cNvSpPr>
-            <a:spLocks noGrp="1"/>
-          </p:cNvSpPr>
-          <p:nvPr>
-            <p:ph type="sldNum" sz="quarter" idx="12"/>
-          </p:nvPr>
-        </p:nvSpPr>
-        <p:spPr/>
-        <p:txBody>
-          <a:bodyPr/>
-          <a:lstStyle/>
-          <a:p>
-            <a:fld id="{EBFD857F-9F30-4CA0-835C-0D438159FA5B}" type="slidenum">
-              <a:rPr lang="en-US" smtClean="0"/>
-              <a:t>5</a:t>
-            </a:fld>
-            <a:endParaRPr lang="en-US"/>
-          </a:p>
-        </p:txBody>
-      </p:sp>
-      <p:sp>
-        <p:nvSpPr>
-          <p:cNvPr id="13" name="TextBox 12">
-            <a:extLst>
-              <a:ext uri="{FF2B5EF4-FFF2-40B4-BE49-F238E27FC236}">
-                <a16:creationId xmlns:a16="http://schemas.microsoft.com/office/drawing/2014/main" id="{17F58D1B-56A2-1232-6002-8B21BC104684}"/>
-              </a:ext>
-            </a:extLst>
-          </p:cNvPr>
-          <p:cNvSpPr txBox="1"/>
-          <p:nvPr/>
-        </p:nvSpPr>
-        <p:spPr>
-          <a:xfrm>
-            <a:off x="3552633" y="901649"/>
-            <a:ext cx="4962717" cy="1446550"/>
-          </a:xfrm>
-          <a:prstGeom prst="rect">
-            <a:avLst/>
-          </a:prstGeom>
-          <a:noFill/>
-        </p:spPr>
-        <p:txBody>
-          <a:bodyPr wrap="square" rtlCol="0">
-            <a:spAutoFit/>
-          </a:bodyPr>
-          <a:lstStyle/>
-          <a:p>
-            <a:r>
-              <a:rPr lang="en-US" dirty="0"/>
-              <a:t>Soldered implementation of LCD panel:</a:t>
-            </a:r>
-            <a:endParaRPr lang="en-US" sz="1000" dirty="0"/>
-          </a:p>
-          <a:p>
-            <a:r>
-              <a:rPr lang="en-US" sz="1000" dirty="0"/>
-              <a:t>(rendered in Fritzing, but it doesn’t understand two-sided perf boards, so we manually include views from front and back: some components are shown on both sides to illustrate where they are located. Fritzing also does not render right-angle headers. The LCD panel has right-angle male headers for signal connection, so it can be plugged </a:t>
-            </a:r>
-            <a:r>
-              <a:rPr lang="en-US" sz="1000" dirty="0" err="1"/>
-              <a:t>directely</a:t>
-            </a:r>
-            <a:r>
-              <a:rPr lang="en-US" sz="1000" dirty="0"/>
-              <a:t> into the Arduino if desired, and both RA male and standing female headers for power) … </a:t>
-            </a:r>
-            <a:r>
-              <a:rPr lang="en-US" sz="1000" b="1" dirty="0"/>
-              <a:t>slight improvement</a:t>
-            </a:r>
-            <a:r>
-              <a:rPr lang="en-US" sz="1000" dirty="0"/>
-              <a:t> to move trim pot away from corner and have right-angle headers point in same direction to save space in project box</a:t>
-            </a:r>
-          </a:p>
-        </p:txBody>
-      </p:sp>
-      <p:sp>
-        <p:nvSpPr>
-          <p:cNvPr id="7" name="TextBox 6">
-            <a:extLst>
-              <a:ext uri="{FF2B5EF4-FFF2-40B4-BE49-F238E27FC236}">
-                <a16:creationId xmlns:a16="http://schemas.microsoft.com/office/drawing/2014/main" id="{48EC70A3-32B4-26E4-B3C6-5BEB83999283}"/>
-              </a:ext>
-            </a:extLst>
-          </p:cNvPr>
-          <p:cNvSpPr txBox="1"/>
-          <p:nvPr/>
-        </p:nvSpPr>
-        <p:spPr>
-          <a:xfrm>
-            <a:off x="304800" y="2446521"/>
-            <a:ext cx="2119423" cy="2554545"/>
-          </a:xfrm>
-          <a:prstGeom prst="rect">
-            <a:avLst/>
-          </a:prstGeom>
-          <a:noFill/>
-        </p:spPr>
-        <p:txBody>
-          <a:bodyPr wrap="square" rtlCol="0">
-            <a:spAutoFit/>
-          </a:bodyPr>
-          <a:lstStyle/>
-          <a:p>
-            <a:r>
-              <a:rPr lang="en-US" sz="1000" dirty="0"/>
-              <a:t>Idea is: </a:t>
-            </a:r>
-          </a:p>
-          <a:p>
-            <a:pPr marL="285750" indent="-285750">
-              <a:buFontTx/>
-              <a:buChar char="-"/>
-            </a:pPr>
-            <a:r>
-              <a:rPr lang="en-US" sz="1000" dirty="0"/>
-              <a:t>power, input “bus”, and LED out goes to button panel</a:t>
-            </a:r>
-          </a:p>
-          <a:p>
-            <a:pPr marL="285750" indent="-285750">
-              <a:buFontTx/>
-              <a:buChar char="-"/>
-            </a:pPr>
-            <a:r>
-              <a:rPr lang="en-US" sz="1000" dirty="0"/>
-              <a:t>LCD panel is powered from button panel</a:t>
-            </a:r>
-          </a:p>
-          <a:p>
-            <a:pPr marL="285750" indent="-285750">
-              <a:buFontTx/>
-              <a:buChar char="-"/>
-            </a:pPr>
-            <a:r>
-              <a:rPr lang="en-US" sz="1000" dirty="0"/>
-              <a:t>Additional inputs can be connected to the input “bus” via peripheral connections to the button panel</a:t>
-            </a:r>
-          </a:p>
-          <a:p>
-            <a:pPr marL="285750" indent="-285750">
-              <a:buFontTx/>
-              <a:buChar char="-"/>
-            </a:pPr>
-            <a:r>
-              <a:rPr lang="en-US" sz="1000" dirty="0"/>
-              <a:t>The “mode” toggle switch is one such peripheral input</a:t>
-            </a:r>
-          </a:p>
-          <a:p>
-            <a:pPr marL="285750" indent="-285750">
-              <a:buFontTx/>
-              <a:buChar char="-"/>
-            </a:pPr>
-            <a:r>
-              <a:rPr lang="en-US" sz="1000" dirty="0"/>
-              <a:t>All digital inputs are active low, configured as INPUT_PULLUP (supposed to be 20k-50k internal pull-ups to 5V)</a:t>
-            </a:r>
-          </a:p>
-        </p:txBody>
-      </p:sp>
-      <p:sp>
-        <p:nvSpPr>
-          <p:cNvPr id="11" name="TextBox 10">
-            <a:extLst>
-              <a:ext uri="{FF2B5EF4-FFF2-40B4-BE49-F238E27FC236}">
-                <a16:creationId xmlns:a16="http://schemas.microsoft.com/office/drawing/2014/main" id="{F934B1F9-CC58-734D-B0B6-2BD483C4A56E}"/>
-              </a:ext>
-            </a:extLst>
-          </p:cNvPr>
-          <p:cNvSpPr txBox="1"/>
-          <p:nvPr/>
-        </p:nvSpPr>
-        <p:spPr>
-          <a:xfrm>
-            <a:off x="3552633" y="2543383"/>
-            <a:ext cx="706860" cy="369332"/>
-          </a:xfrm>
-          <a:prstGeom prst="rect">
-            <a:avLst/>
-          </a:prstGeom>
-          <a:noFill/>
-        </p:spPr>
-        <p:txBody>
-          <a:bodyPr wrap="none" rtlCol="0">
-            <a:spAutoFit/>
-          </a:bodyPr>
-          <a:lstStyle/>
-          <a:p>
-            <a:r>
-              <a:rPr lang="en-US" dirty="0"/>
-              <a:t>Front</a:t>
-            </a:r>
-          </a:p>
-        </p:txBody>
-      </p:sp>
-      <p:sp>
-        <p:nvSpPr>
-          <p:cNvPr id="14" name="TextBox 13">
-            <a:extLst>
-              <a:ext uri="{FF2B5EF4-FFF2-40B4-BE49-F238E27FC236}">
-                <a16:creationId xmlns:a16="http://schemas.microsoft.com/office/drawing/2014/main" id="{C5CA768A-B0AB-28FF-6186-752925D17BC1}"/>
-              </a:ext>
-            </a:extLst>
-          </p:cNvPr>
-          <p:cNvSpPr txBox="1"/>
-          <p:nvPr/>
-        </p:nvSpPr>
-        <p:spPr>
-          <a:xfrm>
-            <a:off x="6541489" y="2526535"/>
-            <a:ext cx="681597" cy="369332"/>
-          </a:xfrm>
-          <a:prstGeom prst="rect">
-            <a:avLst/>
-          </a:prstGeom>
-          <a:noFill/>
-        </p:spPr>
-        <p:txBody>
-          <a:bodyPr wrap="none" rtlCol="0">
-            <a:spAutoFit/>
-          </a:bodyPr>
-          <a:lstStyle/>
-          <a:p>
-            <a:r>
-              <a:rPr lang="en-US" dirty="0"/>
-              <a:t>Back</a:t>
-            </a:r>
-          </a:p>
-        </p:txBody>
-      </p:sp>
-      <p:pic>
-        <p:nvPicPr>
-          <p:cNvPr id="6" name="Picture 5" descr="A close-up of a circuit board&#10;&#10;Description automatically generated">
-            <a:extLst>
-              <a:ext uri="{FF2B5EF4-FFF2-40B4-BE49-F238E27FC236}">
-                <a16:creationId xmlns:a16="http://schemas.microsoft.com/office/drawing/2014/main" id="{083DFA6F-B012-6D34-5651-258B7BEC2550}"/>
-              </a:ext>
-            </a:extLst>
-          </p:cNvPr>
-          <p:cNvPicPr>
-            <a:picLocks noChangeAspect="1"/>
-          </p:cNvPicPr>
-          <p:nvPr/>
-        </p:nvPicPr>
-        <p:blipFill>
-          <a:blip r:embed="rId3">
-            <a:extLst>
-              <a:ext uri="{28A0092B-C50C-407E-A947-70E740481C1C}">
-                <a14:useLocalDpi xmlns:a14="http://schemas.microsoft.com/office/drawing/2010/main" val="0"/>
-              </a:ext>
-            </a:extLst>
-          </a:blip>
-          <a:stretch>
-            <a:fillRect/>
-          </a:stretch>
-        </p:blipFill>
-        <p:spPr>
-          <a:xfrm>
-            <a:off x="5856930" y="4344000"/>
-            <a:ext cx="2453949" cy="2030351"/>
-          </a:xfrm>
-          <a:prstGeom prst="rect">
-            <a:avLst/>
-          </a:prstGeom>
-        </p:spPr>
-      </p:pic>
-    </p:spTree>
-    <p:extLst>
-      <p:ext uri="{BB962C8B-B14F-4D97-AF65-F5344CB8AC3E}">
-        <p14:creationId xmlns:p14="http://schemas.microsoft.com/office/powerpoint/2010/main" val="189384857"/>
-      </p:ext>
-    </p:extLst>
-  </p:cSld>
-  <p:clrMapOvr>
-    <a:masterClrMapping/>
-  </p:clrMapOvr>
-</p:sld>
-</file>
-
-<file path=ppt/slides/slide6.xml><?xml version="1.0" encoding="utf-8"?>
+<file path=ppt/slides/slide4.xml><?xml version="1.0" encoding="utf-8"?>
 <p:sld xmlns:a="http://schemas.openxmlformats.org/drawingml/2006/main" xmlns:r="http://schemas.openxmlformats.org/officeDocument/2006/relationships" xmlns:p="http://schemas.openxmlformats.org/presentationml/2006/main">
   <p:cSld>
     <p:spTree>
@@ -6037,74 +5089,6 @@
       </p:sp>
       <p:sp>
         <p:nvSpPr>
-          <p:cNvPr id="5" name="TextBox 4">
-            <a:extLst>
-              <a:ext uri="{FF2B5EF4-FFF2-40B4-BE49-F238E27FC236}">
-                <a16:creationId xmlns:a16="http://schemas.microsoft.com/office/drawing/2014/main" id="{558789DE-60ED-AFA7-2239-E8D92FF38E1F}"/>
-              </a:ext>
-            </a:extLst>
-          </p:cNvPr>
-          <p:cNvSpPr txBox="1"/>
-          <p:nvPr/>
-        </p:nvSpPr>
-        <p:spPr>
-          <a:xfrm>
-            <a:off x="1581454" y="562372"/>
-            <a:ext cx="7328866" cy="307777"/>
-          </a:xfrm>
-          <a:prstGeom prst="rect">
-            <a:avLst/>
-          </a:prstGeom>
-          <a:noFill/>
-        </p:spPr>
-        <p:txBody>
-          <a:bodyPr wrap="none" rtlCol="0">
-            <a:spAutoFit/>
-          </a:bodyPr>
-          <a:lstStyle/>
-          <a:p>
-            <a:r>
-              <a:rPr lang="en-US" sz="1400" dirty="0">
-                <a:solidFill>
-                  <a:srgbClr val="C00000"/>
-                </a:solidFill>
-              </a:rPr>
-              <a:t>This example for stepper motor-based monochromator controller project: </a:t>
-            </a:r>
-            <a:r>
-              <a:rPr lang="en-US" sz="1400" dirty="0" err="1">
-                <a:solidFill>
-                  <a:srgbClr val="C00000"/>
-                </a:solidFill>
-              </a:rPr>
-              <a:t>arduino</a:t>
-            </a:r>
-            <a:r>
-              <a:rPr lang="en-US" sz="1400" dirty="0">
-                <a:solidFill>
-                  <a:srgbClr val="C00000"/>
-                </a:solidFill>
-              </a:rPr>
-              <a:t>-mono-</a:t>
-            </a:r>
-            <a:r>
-              <a:rPr lang="en-US" sz="1400" dirty="0" err="1">
-                <a:solidFill>
-                  <a:srgbClr val="C00000"/>
-                </a:solidFill>
-              </a:rPr>
-              <a:t>svn</a:t>
-            </a:r>
-            <a:endParaRPr lang="en-US" sz="1400" dirty="0">
-              <a:solidFill>
-                <a:srgbClr val="C00000"/>
-              </a:solidFill>
-            </a:endParaRPr>
-          </a:p>
-        </p:txBody>
-      </p:sp>
-      <p:sp>
-        <p:nvSpPr>
           <p:cNvPr id="9" name="TextBox 8">
             <a:extLst>
               <a:ext uri="{FF2B5EF4-FFF2-40B4-BE49-F238E27FC236}">
@@ -6212,7 +5196,7 @@
           <a:p>
             <a:fld id="{EBFD857F-9F30-4CA0-835C-0D438159FA5B}" type="slidenum">
               <a:rPr lang="en-US" smtClean="0"/>
-              <a:t>6</a:t>
+              <a:t>4</a:t>
             </a:fld>
             <a:endParaRPr lang="en-US"/>
           </a:p>
@@ -6248,7 +5232,7 @@
           <a:p>
             <a:r>
               <a:rPr lang="en-US" dirty="0"/>
-              <a:t>Soldered implementation of button panel (compact):</a:t>
+              <a:t>Soldered implementation of button panel (compact, used in NIR controller):</a:t>
             </a:r>
             <a:endParaRPr lang="en-US" sz="1000" dirty="0"/>
           </a:p>
@@ -6679,7 +5663,7 @@
         </p:nvSpPr>
         <p:spPr>
           <a:xfrm>
-            <a:off x="4076911" y="3082448"/>
+            <a:off x="4069344" y="3102672"/>
             <a:ext cx="1218091" cy="184666"/>
           </a:xfrm>
           <a:prstGeom prst="rect">
@@ -6746,6 +5730,127 @@
                 <a:latin typeface="Arial Narrow" panose="020B0606020202030204" pitchFamily="34" charset="0"/>
               </a:rPr>
               <a:t>A5   A4   A3  A2   A1  A0  5V   G   LED</a:t>
+            </a:r>
+          </a:p>
+        </p:txBody>
+      </p:sp>
+      <p:cxnSp>
+        <p:nvCxnSpPr>
+          <p:cNvPr id="3" name="Straight Arrow Connector 2">
+            <a:extLst>
+              <a:ext uri="{FF2B5EF4-FFF2-40B4-BE49-F238E27FC236}">
+                <a16:creationId xmlns:a16="http://schemas.microsoft.com/office/drawing/2014/main" id="{73057FEF-EF50-2C73-49F3-AE88CD5D90D8}"/>
+              </a:ext>
+            </a:extLst>
+          </p:cNvPr>
+          <p:cNvCxnSpPr/>
+          <p:nvPr/>
+        </p:nvCxnSpPr>
+        <p:spPr>
+          <a:xfrm>
+            <a:off x="3314700" y="3082448"/>
+            <a:ext cx="608714" cy="0"/>
+          </a:xfrm>
+          <a:prstGeom prst="straightConnector1">
+            <a:avLst/>
+          </a:prstGeom>
+          <a:ln>
+            <a:tailEnd type="triangle"/>
+          </a:ln>
+        </p:spPr>
+        <p:style>
+          <a:lnRef idx="2">
+            <a:schemeClr val="accent1"/>
+          </a:lnRef>
+          <a:fillRef idx="0">
+            <a:schemeClr val="accent1"/>
+          </a:fillRef>
+          <a:effectRef idx="1">
+            <a:schemeClr val="accent1"/>
+          </a:effectRef>
+          <a:fontRef idx="minor">
+            <a:schemeClr val="tx1"/>
+          </a:fontRef>
+        </p:style>
+      </p:cxnSp>
+      <p:sp>
+        <p:nvSpPr>
+          <p:cNvPr id="10" name="TextBox 9">
+            <a:extLst>
+              <a:ext uri="{FF2B5EF4-FFF2-40B4-BE49-F238E27FC236}">
+                <a16:creationId xmlns:a16="http://schemas.microsoft.com/office/drawing/2014/main" id="{CC0C3A95-5C9F-7E9E-5366-EE300AC46856}"/>
+              </a:ext>
+            </a:extLst>
+          </p:cNvPr>
+          <p:cNvSpPr txBox="1"/>
+          <p:nvPr/>
+        </p:nvSpPr>
+        <p:spPr>
+          <a:xfrm>
+            <a:off x="2672116" y="2937209"/>
+            <a:ext cx="880517" cy="553998"/>
+          </a:xfrm>
+          <a:prstGeom prst="rect">
+            <a:avLst/>
+          </a:prstGeom>
+          <a:noFill/>
+        </p:spPr>
+        <p:txBody>
+          <a:bodyPr wrap="square" rtlCol="0">
+            <a:spAutoFit/>
+          </a:bodyPr>
+          <a:lstStyle/>
+          <a:p>
+            <a:r>
+              <a:rPr lang="en-US" sz="1000" dirty="0"/>
+              <a:t>220 ohm resistor for LED</a:t>
+            </a:r>
+          </a:p>
+        </p:txBody>
+      </p:sp>
+      <p:sp>
+        <p:nvSpPr>
+          <p:cNvPr id="23" name="TextBox 22">
+            <a:extLst>
+              <a:ext uri="{FF2B5EF4-FFF2-40B4-BE49-F238E27FC236}">
+                <a16:creationId xmlns:a16="http://schemas.microsoft.com/office/drawing/2014/main" id="{27CA5D9B-3EFE-57B1-1428-370B8ECB50CD}"/>
+              </a:ext>
+            </a:extLst>
+          </p:cNvPr>
+          <p:cNvSpPr txBox="1"/>
+          <p:nvPr/>
+        </p:nvSpPr>
+        <p:spPr>
+          <a:xfrm>
+            <a:off x="2218433" y="6380164"/>
+            <a:ext cx="6296917" cy="400110"/>
+          </a:xfrm>
+          <a:prstGeom prst="rect">
+            <a:avLst/>
+          </a:prstGeom>
+          <a:noFill/>
+        </p:spPr>
+        <p:txBody>
+          <a:bodyPr wrap="none" rtlCol="0">
+            <a:spAutoFit/>
+          </a:bodyPr>
+          <a:lstStyle/>
+          <a:p>
+            <a:r>
+              <a:rPr lang="en-US" sz="1000" dirty="0"/>
+              <a:t>Copyright 2026 Andrew B. Greytak, University of South Carolina – Documentation shared via CC-BY-SA-4.0</a:t>
+            </a:r>
+          </a:p>
+          <a:p>
+            <a:r>
+              <a:rPr lang="en-US" sz="1000" dirty="0">
+                <a:hlinkClick r:id="rId3"/>
+              </a:rPr>
+              <a:t>https://github.com/Greytak-Chemistry-Lab/arduino-bli-mono-controller/LICENSE</a:t>
+            </a:r>
+            <a:r>
+              <a:rPr lang="en-US" sz="1000" dirty="0"/>
+              <a:t>  </a:t>
             </a:r>
           </a:p>
         </p:txBody>
@@ -6763,7 +5868,7 @@
 </p:sld>
 </file>
 
-<file path=ppt/slides/slide7.xml><?xml version="1.0" encoding="utf-8"?>
+<file path=ppt/slides/slide5.xml><?xml version="1.0" encoding="utf-8"?>
 <p:sld xmlns:a="http://schemas.openxmlformats.org/drawingml/2006/main" xmlns:r="http://schemas.openxmlformats.org/officeDocument/2006/relationships" xmlns:p="http://schemas.openxmlformats.org/presentationml/2006/main">
   <p:cSld>
     <p:spTree>
@@ -6823,74 +5928,6 @@
       </p:sp>
       <p:sp>
         <p:nvSpPr>
-          <p:cNvPr id="5" name="TextBox 4">
-            <a:extLst>
-              <a:ext uri="{FF2B5EF4-FFF2-40B4-BE49-F238E27FC236}">
-                <a16:creationId xmlns:a16="http://schemas.microsoft.com/office/drawing/2014/main" id="{541E976E-87F8-DDE2-8283-A6187E84E6A7}"/>
-              </a:ext>
-            </a:extLst>
-          </p:cNvPr>
-          <p:cNvSpPr txBox="1"/>
-          <p:nvPr/>
-        </p:nvSpPr>
-        <p:spPr>
-          <a:xfrm>
-            <a:off x="1581454" y="562372"/>
-            <a:ext cx="7328866" cy="307777"/>
-          </a:xfrm>
-          <a:prstGeom prst="rect">
-            <a:avLst/>
-          </a:prstGeom>
-          <a:noFill/>
-        </p:spPr>
-        <p:txBody>
-          <a:bodyPr wrap="none" rtlCol="0">
-            <a:spAutoFit/>
-          </a:bodyPr>
-          <a:lstStyle/>
-          <a:p>
-            <a:r>
-              <a:rPr lang="en-US" sz="1400" dirty="0">
-                <a:solidFill>
-                  <a:srgbClr val="C00000"/>
-                </a:solidFill>
-              </a:rPr>
-              <a:t>This example for stepper motor-based monochromator controller project: </a:t>
-            </a:r>
-            <a:r>
-              <a:rPr lang="en-US" sz="1400" dirty="0" err="1">
-                <a:solidFill>
-                  <a:srgbClr val="C00000"/>
-                </a:solidFill>
-              </a:rPr>
-              <a:t>arduino</a:t>
-            </a:r>
-            <a:r>
-              <a:rPr lang="en-US" sz="1400" dirty="0">
-                <a:solidFill>
-                  <a:srgbClr val="C00000"/>
-                </a:solidFill>
-              </a:rPr>
-              <a:t>-mono-</a:t>
-            </a:r>
-            <a:r>
-              <a:rPr lang="en-US" sz="1400" dirty="0" err="1">
-                <a:solidFill>
-                  <a:srgbClr val="C00000"/>
-                </a:solidFill>
-              </a:rPr>
-              <a:t>svn</a:t>
-            </a:r>
-            <a:endParaRPr lang="en-US" sz="1400" dirty="0">
-              <a:solidFill>
-                <a:srgbClr val="C00000"/>
-              </a:solidFill>
-            </a:endParaRPr>
-          </a:p>
-        </p:txBody>
-      </p:sp>
-      <p:sp>
-        <p:nvSpPr>
           <p:cNvPr id="9" name="TextBox 8">
             <a:extLst>
               <a:ext uri="{FF2B5EF4-FFF2-40B4-BE49-F238E27FC236}">
@@ -6998,7 +6035,7 @@
           <a:p>
             <a:fld id="{EBFD857F-9F30-4CA0-835C-0D438159FA5B}" type="slidenum">
               <a:rPr lang="en-US" smtClean="0"/>
-              <a:t>7</a:t>
+              <a:t>5</a:t>
             </a:fld>
             <a:endParaRPr lang="en-US"/>
           </a:p>
@@ -7034,7 +6071,14 @@
           <a:p>
             <a:r>
               <a:rPr lang="en-US" dirty="0"/>
-              <a:t>Soldered implementation of button panel (half-breadboard size):</a:t>
+              <a:t>Soldered implementation of button panel </a:t>
+            </a:r>
+            <a:br>
+              <a:rPr lang="en-US" dirty="0"/>
+            </a:br>
+            <a:r>
+              <a:rPr lang="en-US" dirty="0"/>
+              <a:t>(half-breadboard size):</a:t>
             </a:r>
             <a:endParaRPr lang="en-US" sz="1000" dirty="0"/>
           </a:p>
@@ -7585,10 +6629,525 @@
           </a:p>
         </p:txBody>
       </p:sp>
+      <p:sp>
+        <p:nvSpPr>
+          <p:cNvPr id="6" name="TextBox 5">
+            <a:extLst>
+              <a:ext uri="{FF2B5EF4-FFF2-40B4-BE49-F238E27FC236}">
+                <a16:creationId xmlns:a16="http://schemas.microsoft.com/office/drawing/2014/main" id="{5188B240-A035-344B-F173-8465B4FFBBD9}"/>
+              </a:ext>
+            </a:extLst>
+          </p:cNvPr>
+          <p:cNvSpPr txBox="1"/>
+          <p:nvPr/>
+        </p:nvSpPr>
+        <p:spPr>
+          <a:xfrm>
+            <a:off x="2218433" y="6380164"/>
+            <a:ext cx="6296917" cy="400110"/>
+          </a:xfrm>
+          <a:prstGeom prst="rect">
+            <a:avLst/>
+          </a:prstGeom>
+          <a:noFill/>
+        </p:spPr>
+        <p:txBody>
+          <a:bodyPr wrap="none" rtlCol="0">
+            <a:spAutoFit/>
+          </a:bodyPr>
+          <a:lstStyle/>
+          <a:p>
+            <a:r>
+              <a:rPr lang="en-US" sz="1000" dirty="0"/>
+              <a:t>Copyright 2026 Andrew B. Greytak, University of South Carolina – Documentation shared via CC-BY-SA-4.0</a:t>
+            </a:r>
+          </a:p>
+          <a:p>
+            <a:r>
+              <a:rPr lang="en-US" sz="1000" dirty="0">
+                <a:hlinkClick r:id="rId3"/>
+              </a:rPr>
+              <a:t>https://github.com/Greytak-Chemistry-Lab/arduino-bli-mono-controller/LICENSE</a:t>
+            </a:r>
+            <a:r>
+              <a:rPr lang="en-US" sz="1000" dirty="0"/>
+              <a:t>  </a:t>
+            </a:r>
+          </a:p>
+        </p:txBody>
+      </p:sp>
     </p:spTree>
     <p:extLst>
       <p:ext uri="{BB962C8B-B14F-4D97-AF65-F5344CB8AC3E}">
         <p14:creationId xmlns:p14="http://schemas.microsoft.com/office/powerpoint/2010/main" val="1632313900"/>
+      </p:ext>
+    </p:extLst>
+  </p:cSld>
+  <p:clrMapOvr>
+    <a:masterClrMapping/>
+  </p:clrMapOvr>
+</p:sld>
+</file>
+
+<file path=ppt/slides/slide6.xml><?xml version="1.0" encoding="utf-8"?>
+<p:sld xmlns:a="http://schemas.openxmlformats.org/drawingml/2006/main" xmlns:r="http://schemas.openxmlformats.org/officeDocument/2006/relationships" xmlns:p="http://schemas.openxmlformats.org/presentationml/2006/main">
+  <p:cSld>
+    <p:spTree>
+      <p:nvGrpSpPr>
+        <p:cNvPr id="1" name="">
+          <a:extLst>
+            <a:ext uri="{FF2B5EF4-FFF2-40B4-BE49-F238E27FC236}">
+              <a16:creationId xmlns:a16="http://schemas.microsoft.com/office/drawing/2014/main" id="{538B1EBC-4921-B062-08F5-DF005D114EE0}"/>
+            </a:ext>
+          </a:extLst>
+        </p:cNvPr>
+        <p:cNvGrpSpPr/>
+        <p:nvPr/>
+      </p:nvGrpSpPr>
+      <p:grpSpPr>
+        <a:xfrm>
+          <a:off x="0" y="0"/>
+          <a:ext cx="0" cy="0"/>
+          <a:chOff x="0" y="0"/>
+          <a:chExt cx="0" cy="0"/>
+        </a:xfrm>
+      </p:grpSpPr>
+      <p:sp>
+        <p:nvSpPr>
+          <p:cNvPr id="4" name="TextBox 3">
+            <a:extLst>
+              <a:ext uri="{FF2B5EF4-FFF2-40B4-BE49-F238E27FC236}">
+                <a16:creationId xmlns:a16="http://schemas.microsoft.com/office/drawing/2014/main" id="{31E2AB85-AB5E-D016-3562-ABC734585C52}"/>
+              </a:ext>
+            </a:extLst>
+          </p:cNvPr>
+          <p:cNvSpPr txBox="1"/>
+          <p:nvPr/>
+        </p:nvSpPr>
+        <p:spPr>
+          <a:xfrm>
+            <a:off x="233680" y="193040"/>
+            <a:ext cx="6637907" cy="369332"/>
+          </a:xfrm>
+          <a:prstGeom prst="rect">
+            <a:avLst/>
+          </a:prstGeom>
+          <a:noFill/>
+        </p:spPr>
+        <p:txBody>
+          <a:bodyPr wrap="none" rtlCol="0">
+            <a:spAutoFit/>
+          </a:bodyPr>
+          <a:lstStyle/>
+          <a:p>
+            <a:r>
+              <a:rPr lang="en-US" dirty="0"/>
+              <a:t>Hardware layout for modular Arduino lab instrument, Greytak lab </a:t>
+            </a:r>
+          </a:p>
+        </p:txBody>
+      </p:sp>
+      <p:sp>
+        <p:nvSpPr>
+          <p:cNvPr id="12" name="Slide Number Placeholder 11">
+            <a:extLst>
+              <a:ext uri="{FF2B5EF4-FFF2-40B4-BE49-F238E27FC236}">
+                <a16:creationId xmlns:a16="http://schemas.microsoft.com/office/drawing/2014/main" id="{3B1D6E84-37A8-C663-AF7A-1C07A39E88FB}"/>
+              </a:ext>
+            </a:extLst>
+          </p:cNvPr>
+          <p:cNvSpPr>
+            <a:spLocks noGrp="1"/>
+          </p:cNvSpPr>
+          <p:nvPr>
+            <p:ph type="sldNum" sz="quarter" idx="12"/>
+          </p:nvPr>
+        </p:nvSpPr>
+        <p:spPr/>
+        <p:txBody>
+          <a:bodyPr/>
+          <a:lstStyle/>
+          <a:p>
+            <a:fld id="{EBFD857F-9F30-4CA0-835C-0D438159FA5B}" type="slidenum">
+              <a:rPr lang="en-US" smtClean="0"/>
+              <a:t>6</a:t>
+            </a:fld>
+            <a:endParaRPr lang="en-US"/>
+          </a:p>
+        </p:txBody>
+      </p:sp>
+      <p:sp>
+        <p:nvSpPr>
+          <p:cNvPr id="6" name="TextBox 5">
+            <a:extLst>
+              <a:ext uri="{FF2B5EF4-FFF2-40B4-BE49-F238E27FC236}">
+                <a16:creationId xmlns:a16="http://schemas.microsoft.com/office/drawing/2014/main" id="{87C5A3EE-22B1-801E-7A40-48B0CF51A819}"/>
+              </a:ext>
+            </a:extLst>
+          </p:cNvPr>
+          <p:cNvSpPr txBox="1"/>
+          <p:nvPr/>
+        </p:nvSpPr>
+        <p:spPr>
+          <a:xfrm>
+            <a:off x="2218433" y="6380164"/>
+            <a:ext cx="6296917" cy="400110"/>
+          </a:xfrm>
+          <a:prstGeom prst="rect">
+            <a:avLst/>
+          </a:prstGeom>
+          <a:noFill/>
+        </p:spPr>
+        <p:txBody>
+          <a:bodyPr wrap="none" rtlCol="0">
+            <a:spAutoFit/>
+          </a:bodyPr>
+          <a:lstStyle/>
+          <a:p>
+            <a:r>
+              <a:rPr lang="en-US" sz="1000" dirty="0"/>
+              <a:t>Copyright 2026 Andrew B. Greytak, University of South Carolina – Documentation shared via CC-BY-SA-4.0</a:t>
+            </a:r>
+          </a:p>
+          <a:p>
+            <a:r>
+              <a:rPr lang="en-US" sz="1000" dirty="0">
+                <a:hlinkClick r:id="rId2"/>
+              </a:rPr>
+              <a:t>https://github.com/Greytak-Chemistry-Lab/arduino-bli-mono-controller/LICENSE</a:t>
+            </a:r>
+            <a:r>
+              <a:rPr lang="en-US" sz="1000" dirty="0"/>
+              <a:t>  </a:t>
+            </a:r>
+          </a:p>
+        </p:txBody>
+      </p:sp>
+      <p:pic>
+        <p:nvPicPr>
+          <p:cNvPr id="5" name="Picture 4">
+            <a:extLst>
+              <a:ext uri="{FF2B5EF4-FFF2-40B4-BE49-F238E27FC236}">
+                <a16:creationId xmlns:a16="http://schemas.microsoft.com/office/drawing/2014/main" id="{8F6DBC9F-145D-FDBB-F242-0EADB241BE42}"/>
+              </a:ext>
+            </a:extLst>
+          </p:cNvPr>
+          <p:cNvPicPr>
+            <a:picLocks noChangeAspect="1"/>
+          </p:cNvPicPr>
+          <p:nvPr/>
+        </p:nvPicPr>
+        <p:blipFill>
+          <a:blip r:embed="rId3">
+            <a:extLst>
+              <a:ext uri="{28A0092B-C50C-407E-A947-70E740481C1C}">
+                <a14:useLocalDpi xmlns:a14="http://schemas.microsoft.com/office/drawing/2010/main" val="0"/>
+              </a:ext>
+            </a:extLst>
+          </a:blip>
+          <a:stretch>
+            <a:fillRect/>
+          </a:stretch>
+        </p:blipFill>
+        <p:spPr>
+          <a:xfrm>
+            <a:off x="718437" y="2680693"/>
+            <a:ext cx="4490243" cy="3367682"/>
+          </a:xfrm>
+          <a:prstGeom prst="rect">
+            <a:avLst/>
+          </a:prstGeom>
+        </p:spPr>
+      </p:pic>
+      <p:pic>
+        <p:nvPicPr>
+          <p:cNvPr id="24" name="Picture 23">
+            <a:extLst>
+              <a:ext uri="{FF2B5EF4-FFF2-40B4-BE49-F238E27FC236}">
+                <a16:creationId xmlns:a16="http://schemas.microsoft.com/office/drawing/2014/main" id="{1AAC615F-522C-2C9E-68EB-B5622697E296}"/>
+              </a:ext>
+            </a:extLst>
+          </p:cNvPr>
+          <p:cNvPicPr>
+            <a:picLocks noChangeAspect="1"/>
+          </p:cNvPicPr>
+          <p:nvPr/>
+        </p:nvPicPr>
+        <p:blipFill>
+          <a:blip r:embed="rId4">
+            <a:extLst>
+              <a:ext uri="{28A0092B-C50C-407E-A947-70E740481C1C}">
+                <a14:useLocalDpi xmlns:a14="http://schemas.microsoft.com/office/drawing/2010/main" val="0"/>
+              </a:ext>
+            </a:extLst>
+          </a:blip>
+          <a:srcRect l="31259" t="17695" r="11891" b="15555"/>
+          <a:stretch>
+            <a:fillRect/>
+          </a:stretch>
+        </p:blipFill>
+        <p:spPr>
+          <a:xfrm rot="5400000">
+            <a:off x="5409936" y="944704"/>
+            <a:ext cx="3367681" cy="2965570"/>
+          </a:xfrm>
+          <a:prstGeom prst="rect">
+            <a:avLst/>
+          </a:prstGeom>
+        </p:spPr>
+      </p:pic>
+      <p:sp>
+        <p:nvSpPr>
+          <p:cNvPr id="25" name="Arrow: Right 24">
+            <a:extLst>
+              <a:ext uri="{FF2B5EF4-FFF2-40B4-BE49-F238E27FC236}">
+                <a16:creationId xmlns:a16="http://schemas.microsoft.com/office/drawing/2014/main" id="{3BF09BB3-21FC-CDD9-C8B7-3BC9353FB70B}"/>
+              </a:ext>
+            </a:extLst>
+          </p:cNvPr>
+          <p:cNvSpPr/>
+          <p:nvPr/>
+        </p:nvSpPr>
+        <p:spPr>
+          <a:xfrm rot="8446779">
+            <a:off x="3192135" y="2400629"/>
+            <a:ext cx="2546040" cy="504825"/>
+          </a:xfrm>
+          <a:prstGeom prst="rightArrow">
+            <a:avLst/>
+          </a:prstGeom>
+        </p:spPr>
+        <p:style>
+          <a:lnRef idx="2">
+            <a:schemeClr val="accent1">
+              <a:shade val="15000"/>
+            </a:schemeClr>
+          </a:lnRef>
+          <a:fillRef idx="1">
+            <a:schemeClr val="accent1"/>
+          </a:fillRef>
+          <a:effectRef idx="0">
+            <a:schemeClr val="accent1"/>
+          </a:effectRef>
+          <a:fontRef idx="minor">
+            <a:schemeClr val="lt1"/>
+          </a:fontRef>
+        </p:style>
+        <p:txBody>
+          <a:bodyPr rtlCol="0" anchor="ctr"/>
+          <a:lstStyle/>
+          <a:p>
+            <a:pPr algn="ctr"/>
+            <a:endParaRPr lang="en-US"/>
+          </a:p>
+        </p:txBody>
+      </p:sp>
+      <p:sp>
+        <p:nvSpPr>
+          <p:cNvPr id="26" name="TextBox 25">
+            <a:extLst>
+              <a:ext uri="{FF2B5EF4-FFF2-40B4-BE49-F238E27FC236}">
+                <a16:creationId xmlns:a16="http://schemas.microsoft.com/office/drawing/2014/main" id="{51AD36BA-3644-74E6-C175-FB63A59DAD08}"/>
+              </a:ext>
+            </a:extLst>
+          </p:cNvPr>
+          <p:cNvSpPr txBox="1"/>
+          <p:nvPr/>
+        </p:nvSpPr>
+        <p:spPr>
+          <a:xfrm>
+            <a:off x="5530847" y="4135143"/>
+            <a:ext cx="3175003" cy="523220"/>
+          </a:xfrm>
+          <a:prstGeom prst="rect">
+            <a:avLst/>
+          </a:prstGeom>
+          <a:noFill/>
+        </p:spPr>
+        <p:txBody>
+          <a:bodyPr wrap="square" rtlCol="0">
+            <a:spAutoFit/>
+          </a:bodyPr>
+          <a:lstStyle/>
+          <a:p>
+            <a:r>
+              <a:rPr lang="en-US" sz="1400" dirty="0"/>
+              <a:t>Motor driver shield </a:t>
+            </a:r>
+            <a:br>
+              <a:rPr lang="en-US" sz="1400" dirty="0"/>
+            </a:br>
+            <a:r>
+              <a:rPr lang="en-US" sz="1400" dirty="0"/>
+              <a:t>(prototype, similar to the one installed)</a:t>
+            </a:r>
+          </a:p>
+        </p:txBody>
+      </p:sp>
+      <p:cxnSp>
+        <p:nvCxnSpPr>
+          <p:cNvPr id="28" name="Straight Arrow Connector 27">
+            <a:extLst>
+              <a:ext uri="{FF2B5EF4-FFF2-40B4-BE49-F238E27FC236}">
+                <a16:creationId xmlns:a16="http://schemas.microsoft.com/office/drawing/2014/main" id="{A48C06E2-EB34-3196-5116-B4E047F1CFCD}"/>
+              </a:ext>
+            </a:extLst>
+          </p:cNvPr>
+          <p:cNvCxnSpPr/>
+          <p:nvPr/>
+        </p:nvCxnSpPr>
+        <p:spPr>
+          <a:xfrm flipH="1">
+            <a:off x="4465155" y="3543300"/>
+            <a:ext cx="202095" cy="476250"/>
+          </a:xfrm>
+          <a:prstGeom prst="straightConnector1">
+            <a:avLst/>
+          </a:prstGeom>
+          <a:ln w="28575">
+            <a:solidFill>
+              <a:schemeClr val="bg2"/>
+            </a:solidFill>
+            <a:tailEnd type="triangle"/>
+          </a:ln>
+        </p:spPr>
+        <p:style>
+          <a:lnRef idx="2">
+            <a:schemeClr val="accent1"/>
+          </a:lnRef>
+          <a:fillRef idx="0">
+            <a:schemeClr val="accent1"/>
+          </a:fillRef>
+          <a:effectRef idx="1">
+            <a:schemeClr val="accent1"/>
+          </a:effectRef>
+          <a:fontRef idx="minor">
+            <a:schemeClr val="tx1"/>
+          </a:fontRef>
+        </p:style>
+      </p:cxnSp>
+      <p:sp>
+        <p:nvSpPr>
+          <p:cNvPr id="29" name="TextBox 28">
+            <a:extLst>
+              <a:ext uri="{FF2B5EF4-FFF2-40B4-BE49-F238E27FC236}">
+                <a16:creationId xmlns:a16="http://schemas.microsoft.com/office/drawing/2014/main" id="{05B3984E-1DA0-AE76-8A08-F600A8CCFA5C}"/>
+              </a:ext>
+            </a:extLst>
+          </p:cNvPr>
+          <p:cNvSpPr txBox="1"/>
+          <p:nvPr/>
+        </p:nvSpPr>
+        <p:spPr>
+          <a:xfrm>
+            <a:off x="4566202" y="3314700"/>
+            <a:ext cx="407484" cy="246221"/>
+          </a:xfrm>
+          <a:prstGeom prst="rect">
+            <a:avLst/>
+          </a:prstGeom>
+          <a:solidFill>
+            <a:schemeClr val="bg1"/>
+          </a:solidFill>
+        </p:spPr>
+        <p:txBody>
+          <a:bodyPr wrap="none" rtlCol="0">
+            <a:spAutoFit/>
+          </a:bodyPr>
+          <a:lstStyle/>
+          <a:p>
+            <a:r>
+              <a:rPr lang="en-US" sz="1000" dirty="0"/>
+              <a:t>LED</a:t>
+            </a:r>
+          </a:p>
+        </p:txBody>
+      </p:sp>
+      <p:sp>
+        <p:nvSpPr>
+          <p:cNvPr id="31" name="TextBox 30">
+            <a:extLst>
+              <a:ext uri="{FF2B5EF4-FFF2-40B4-BE49-F238E27FC236}">
+                <a16:creationId xmlns:a16="http://schemas.microsoft.com/office/drawing/2014/main" id="{C52858F4-47F8-CE61-607B-2DA3272B58AF}"/>
+              </a:ext>
+            </a:extLst>
+          </p:cNvPr>
+          <p:cNvSpPr txBox="1"/>
+          <p:nvPr/>
+        </p:nvSpPr>
+        <p:spPr>
+          <a:xfrm>
+            <a:off x="1610197" y="5771848"/>
+            <a:ext cx="1709122" cy="246221"/>
+          </a:xfrm>
+          <a:prstGeom prst="rect">
+            <a:avLst/>
+          </a:prstGeom>
+          <a:solidFill>
+            <a:schemeClr val="bg1"/>
+          </a:solidFill>
+        </p:spPr>
+        <p:txBody>
+          <a:bodyPr wrap="none" rtlCol="0">
+            <a:spAutoFit/>
+          </a:bodyPr>
+          <a:lstStyle/>
+          <a:p>
+            <a:r>
+              <a:rPr lang="en-US" sz="1000" dirty="0"/>
+              <a:t>Manual / Auto toggle switch</a:t>
+            </a:r>
+          </a:p>
+        </p:txBody>
+      </p:sp>
+      <p:cxnSp>
+        <p:nvCxnSpPr>
+          <p:cNvPr id="32" name="Straight Arrow Connector 31">
+            <a:extLst>
+              <a:ext uri="{FF2B5EF4-FFF2-40B4-BE49-F238E27FC236}">
+                <a16:creationId xmlns:a16="http://schemas.microsoft.com/office/drawing/2014/main" id="{C2580203-C7FA-B91E-E3C7-B5AB5491750F}"/>
+              </a:ext>
+            </a:extLst>
+          </p:cNvPr>
+          <p:cNvCxnSpPr>
+            <a:cxnSpLocks/>
+          </p:cNvCxnSpPr>
+          <p:nvPr/>
+        </p:nvCxnSpPr>
+        <p:spPr>
+          <a:xfrm flipV="1">
+            <a:off x="2218433" y="5205444"/>
+            <a:ext cx="924817" cy="566404"/>
+          </a:xfrm>
+          <a:prstGeom prst="straightConnector1">
+            <a:avLst/>
+          </a:prstGeom>
+          <a:ln w="28575">
+            <a:solidFill>
+              <a:schemeClr val="bg2"/>
+            </a:solidFill>
+            <a:tailEnd type="triangle"/>
+          </a:ln>
+        </p:spPr>
+        <p:style>
+          <a:lnRef idx="2">
+            <a:schemeClr val="accent1"/>
+          </a:lnRef>
+          <a:fillRef idx="0">
+            <a:schemeClr val="accent1"/>
+          </a:fillRef>
+          <a:effectRef idx="1">
+            <a:schemeClr val="accent1"/>
+          </a:effectRef>
+          <a:fontRef idx="minor">
+            <a:schemeClr val="tx1"/>
+          </a:fontRef>
+        </p:style>
+      </p:cxnSp>
+    </p:spTree>
+    <p:extLst>
+      <p:ext uri="{BB962C8B-B14F-4D97-AF65-F5344CB8AC3E}">
+        <p14:creationId xmlns:p14="http://schemas.microsoft.com/office/powerpoint/2010/main" val="2954169774"/>
       </p:ext>
     </p:extLst>
   </p:cSld>
